--- a/slides/sesion-04.pptx
+++ b/slides/sesion-04.pptx
@@ -6464,7 +6464,7 @@
                 </a:solidFill>
                 <a:latin typeface="Calibri"/>
               </a:rPr>
-              <a:t>•  Examen Parcial en la próxima sesión: defensa del Proyecto 1</a:t>
+              <a:t>•  Examen Parcial en la próxima sesión: escrito en línea + entrega del Proyecto 1</a:t>
             </a:r>
           </a:p>
         </p:txBody>

--- a/slides/sesion-04.pptx
+++ b/slides/sesion-04.pptx
@@ -14,6 +14,8 @@
     <p:sldId id="262" r:id="rId13"/>
     <p:sldId id="263" r:id="rId14"/>
     <p:sldId id="264" r:id="rId15"/>
+    <p:sldId id="265" r:id="rId16"/>
+    <p:sldId id="266" r:id="rId17"/>
   </p:sldIdLst>
   <p:sldSz cx="12191695" cy="6858000" type="screen4x3"/>
   <p:notesSz cx="6858000" cy="9144000"/>
@@ -3383,11 +3385,808 @@
             <a:r>
               <a:rPr sz="1500" b="0">
                 <a:solidFill>
-                  <a:srgbClr val="8A7C70"/>
+                  <a:srgbClr val="6F645B"/>
                 </a:solidFill>
                 <a:latin typeface="Calibri"/>
               </a:rPr>
               <a:t>Licenciatura en Comunicación y Diseño · Universidad Galileo · Docente: Adrián Catalán</a:t>
+            </a:r>
+          </a:p>
+        </p:txBody>
+      </p:sp>
+    </p:spTree>
+  </p:cSld>
+  <p:clrMapOvr>
+    <a:masterClrMapping/>
+  </p:clrMapOvr>
+</p:sld>
+</file>
+
+<file path=ppt/slides/slide10.xml><?xml version="1.0" encoding="utf-8"?>
+<p:sld xmlns:a="http://schemas.openxmlformats.org/drawingml/2006/main" xmlns:p="http://schemas.openxmlformats.org/presentationml/2006/main" xmlns:r="http://schemas.openxmlformats.org/officeDocument/2006/relationships">
+  <p:cSld>
+    <p:bg>
+      <p:bgPr>
+        <a:solidFill>
+          <a:srgbClr val="FDF6EC"/>
+        </a:solidFill>
+        <a:effectLst/>
+      </p:bgPr>
+    </p:bg>
+    <p:spTree>
+      <p:nvGrpSpPr>
+        <p:cNvPr id="1" name=""/>
+        <p:cNvGrpSpPr/>
+        <p:nvPr/>
+      </p:nvGrpSpPr>
+      <p:grpSpPr/>
+      <p:sp>
+        <p:nvSpPr>
+          <p:cNvPr id="2" name="Rounded Rectangle 1"/>
+          <p:cNvSpPr/>
+          <p:nvPr/>
+        </p:nvSpPr>
+        <p:spPr>
+          <a:xfrm>
+            <a:off x="640080" y="640080"/>
+            <a:ext cx="10908792" cy="5577840"/>
+          </a:xfrm>
+          <a:prstGeom prst="roundRect">
+            <a:avLst/>
+          </a:prstGeom>
+          <a:solidFill>
+            <a:srgbClr val="FFFFFF"/>
+          </a:solidFill>
+          <a:ln w="15240">
+            <a:solidFill>
+              <a:srgbClr val="EADDC8"/>
+            </a:solidFill>
+          </a:ln>
+          <a:effectLst/>
+        </p:spPr>
+        <p:style>
+          <a:lnRef idx="1">
+            <a:schemeClr val="accent1"/>
+          </a:lnRef>
+          <a:fillRef idx="3">
+            <a:schemeClr val="accent1"/>
+          </a:fillRef>
+          <a:effectRef idx="2">
+            <a:schemeClr val="accent1"/>
+          </a:effectRef>
+          <a:fontRef idx="minor">
+            <a:schemeClr val="lt1"/>
+          </a:fontRef>
+        </p:style>
+        <p:txBody>
+          <a:bodyPr rtlCol="0" anchor="ctr"/>
+          <a:lstStyle/>
+          <a:p>
+            <a:pPr algn="ctr"/>
+          </a:p>
+        </p:txBody>
+      </p:sp>
+      <p:sp>
+        <p:nvSpPr>
+          <p:cNvPr id="3" name="Rectangle 2"/>
+          <p:cNvSpPr/>
+          <p:nvPr/>
+        </p:nvSpPr>
+        <p:spPr>
+          <a:xfrm>
+            <a:off x="640080" y="640080"/>
+            <a:ext cx="201168" cy="5577840"/>
+          </a:xfrm>
+          <a:prstGeom prst="rect">
+            <a:avLst/>
+          </a:prstGeom>
+          <a:solidFill>
+            <a:srgbClr val="E3B23C"/>
+          </a:solidFill>
+          <a:ln>
+            <a:noFill/>
+          </a:ln>
+          <a:effectLst/>
+        </p:spPr>
+        <p:style>
+          <a:lnRef idx="1">
+            <a:schemeClr val="accent1"/>
+          </a:lnRef>
+          <a:fillRef idx="3">
+            <a:schemeClr val="accent1"/>
+          </a:fillRef>
+          <a:effectRef idx="2">
+            <a:schemeClr val="accent1"/>
+          </a:effectRef>
+          <a:fontRef idx="minor">
+            <a:schemeClr val="lt1"/>
+          </a:fontRef>
+        </p:style>
+        <p:txBody>
+          <a:bodyPr rtlCol="0" anchor="ctr"/>
+          <a:lstStyle/>
+          <a:p>
+            <a:pPr algn="ctr"/>
+          </a:p>
+        </p:txBody>
+      </p:sp>
+      <p:sp>
+        <p:nvSpPr>
+          <p:cNvPr id="4" name="TextBox 3"/>
+          <p:cNvSpPr txBox="1"/>
+          <p:nvPr/>
+        </p:nvSpPr>
+        <p:spPr>
+          <a:xfrm>
+            <a:off x="1051560" y="960120"/>
+            <a:ext cx="10058400" cy="457200"/>
+          </a:xfrm>
+          <a:prstGeom prst="rect">
+            <a:avLst/>
+          </a:prstGeom>
+          <a:noFill/>
+        </p:spPr>
+        <p:txBody>
+          <a:bodyPr wrap="square" anchor="t">
+            <a:spAutoFit/>
+          </a:bodyPr>
+          <a:lstStyle/>
+          <a:p>
+            <a:pPr algn="l">
+              <a:spcAft>
+                <a:spcPts val="600"/>
+              </a:spcAft>
+            </a:pPr>
+            <a:r>
+              <a:rPr sz="2000" b="1">
+                <a:solidFill>
+                  <a:srgbClr val="C84B31"/>
+                </a:solidFill>
+                <a:latin typeface="Calibri"/>
+              </a:rPr>
+              <a:t>LABORATORIO DE HOY</a:t>
+            </a:r>
+          </a:p>
+        </p:txBody>
+      </p:sp>
+      <p:sp>
+        <p:nvSpPr>
+          <p:cNvPr id="5" name="TextBox 4"/>
+          <p:cNvSpPr txBox="1"/>
+          <p:nvPr/>
+        </p:nvSpPr>
+        <p:spPr>
+          <a:xfrm>
+            <a:off x="1051560" y="1463040"/>
+            <a:ext cx="10058400" cy="914400"/>
+          </a:xfrm>
+          <a:prstGeom prst="rect">
+            <a:avLst/>
+          </a:prstGeom>
+          <a:noFill/>
+        </p:spPr>
+        <p:txBody>
+          <a:bodyPr wrap="square" anchor="t">
+            <a:spAutoFit/>
+          </a:bodyPr>
+          <a:lstStyle/>
+          <a:p>
+            <a:pPr algn="l">
+              <a:spcAft>
+                <a:spcPts val="600"/>
+              </a:spcAft>
+            </a:pPr>
+            <a:r>
+              <a:rPr sz="3400" b="1">
+                <a:solidFill>
+                  <a:srgbClr val="6D2E46"/>
+                </a:solidFill>
+                <a:latin typeface="Calibri"/>
+              </a:rPr>
+              <a:t>Laboratorio 4 — App nativa en el emulador del navegador</a:t>
+            </a:r>
+          </a:p>
+        </p:txBody>
+      </p:sp>
+      <p:sp>
+        <p:nvSpPr>
+          <p:cNvPr id="6" name="TextBox 5"/>
+          <p:cNvSpPr txBox="1"/>
+          <p:nvPr/>
+        </p:nvSpPr>
+        <p:spPr>
+          <a:xfrm>
+            <a:off x="1097280" y="2606040"/>
+            <a:ext cx="9875520" cy="3383280"/>
+          </a:xfrm>
+          <a:prstGeom prst="rect">
+            <a:avLst/>
+          </a:prstGeom>
+          <a:noFill/>
+        </p:spPr>
+        <p:txBody>
+          <a:bodyPr wrap="square">
+            <a:spAutoFit/>
+          </a:bodyPr>
+          <a:lstStyle/>
+          <a:p>
+            <a:pPr>
+              <a:spcAft>
+                <a:spcPts val="1500"/>
+              </a:spcAft>
+            </a:pPr>
+            <a:r>
+              <a:rPr sz="2300">
+                <a:solidFill>
+                  <a:srgbClr val="2B2B2B"/>
+                </a:solidFill>
+                <a:latin typeface="Calibri"/>
+              </a:rPr>
+              <a:t>•  Crea una app nueva en AI Studio (modo Build)</a:t>
+            </a:r>
+          </a:p>
+          <a:p>
+            <a:pPr>
+              <a:spcAft>
+                <a:spcPts val="1500"/>
+              </a:spcAft>
+            </a:pPr>
+            <a:r>
+              <a:rPr sz="2300">
+                <a:solidFill>
+                  <a:srgbClr val="2B2B2B"/>
+                </a:solidFill>
+                <a:latin typeface="Calibri"/>
+              </a:rPr>
+              <a:t>•  Pide una app nativa de Android (Kotlin + Jetpack Compose) "Bitácora Visual"</a:t>
+            </a:r>
+          </a:p>
+          <a:p>
+            <a:pPr>
+              <a:spcAft>
+                <a:spcPts val="1500"/>
+              </a:spcAft>
+            </a:pPr>
+            <a:r>
+              <a:rPr sz="2300">
+                <a:solidFill>
+                  <a:srgbClr val="2B2B2B"/>
+                </a:solidFill>
+                <a:latin typeface="Calibri"/>
+              </a:rPr>
+              <a:t>•  Revisa la bitácora de ejemplo en el emulador integrado del navegador</a:t>
+            </a:r>
+          </a:p>
+          <a:p>
+            <a:pPr>
+              <a:spcAft>
+                <a:spcPts val="1500"/>
+              </a:spcAft>
+            </a:pPr>
+            <a:r>
+              <a:rPr sz="2300">
+                <a:solidFill>
+                  <a:srgbClr val="2B2B2B"/>
+                </a:solidFill>
+                <a:latin typeface="Calibri"/>
+              </a:rPr>
+              <a:t>•  Prueba "Install on Device" en tu teléfono por USB (opcional)</a:t>
+            </a:r>
+          </a:p>
+          <a:p>
+            <a:pPr>
+              <a:spcAft>
+                <a:spcPts val="1500"/>
+              </a:spcAft>
+            </a:pPr>
+            <a:r>
+              <a:rPr sz="2300">
+                <a:solidFill>
+                  <a:srgbClr val="2B2B2B"/>
+                </a:solidFill>
+                <a:latin typeface="Calibri"/>
+              </a:rPr>
+              <a:t>•  Refina la cuadrícula de entradas y revisa con View diff</a:t>
+            </a:r>
+          </a:p>
+        </p:txBody>
+      </p:sp>
+    </p:spTree>
+  </p:cSld>
+  <p:clrMapOvr>
+    <a:masterClrMapping/>
+  </p:clrMapOvr>
+</p:sld>
+</file>
+
+<file path=ppt/slides/slide11.xml><?xml version="1.0" encoding="utf-8"?>
+<p:sld xmlns:a="http://schemas.openxmlformats.org/drawingml/2006/main" xmlns:p="http://schemas.openxmlformats.org/presentationml/2006/main" xmlns:r="http://schemas.openxmlformats.org/officeDocument/2006/relationships">
+  <p:cSld>
+    <p:bg>
+      <p:bgPr>
+        <a:solidFill>
+          <a:srgbClr val="FDF6EC"/>
+        </a:solidFill>
+        <a:effectLst/>
+      </p:bgPr>
+    </p:bg>
+    <p:spTree>
+      <p:nvGrpSpPr>
+        <p:cNvPr id="1" name=""/>
+        <p:cNvGrpSpPr/>
+        <p:nvPr/>
+      </p:nvGrpSpPr>
+      <p:grpSpPr/>
+      <p:sp>
+        <p:nvSpPr>
+          <p:cNvPr id="2" name="Rectangle 1"/>
+          <p:cNvSpPr/>
+          <p:nvPr/>
+        </p:nvSpPr>
+        <p:spPr>
+          <a:xfrm>
+            <a:off x="0" y="0"/>
+            <a:ext cx="12191695" cy="146304"/>
+          </a:xfrm>
+          <a:prstGeom prst="rect">
+            <a:avLst/>
+          </a:prstGeom>
+          <a:solidFill>
+            <a:srgbClr val="6D2E46"/>
+          </a:solidFill>
+          <a:ln>
+            <a:noFill/>
+          </a:ln>
+          <a:effectLst/>
+        </p:spPr>
+        <p:style>
+          <a:lnRef idx="1">
+            <a:schemeClr val="accent1"/>
+          </a:lnRef>
+          <a:fillRef idx="3">
+            <a:schemeClr val="accent1"/>
+          </a:fillRef>
+          <a:effectRef idx="2">
+            <a:schemeClr val="accent1"/>
+          </a:effectRef>
+          <a:fontRef idx="minor">
+            <a:schemeClr val="lt1"/>
+          </a:fontRef>
+        </p:style>
+        <p:txBody>
+          <a:bodyPr rtlCol="0" anchor="ctr"/>
+          <a:lstStyle/>
+          <a:p>
+            <a:pPr algn="ctr"/>
+          </a:p>
+        </p:txBody>
+      </p:sp>
+      <p:sp>
+        <p:nvSpPr>
+          <p:cNvPr id="3" name="TextBox 2"/>
+          <p:cNvSpPr txBox="1"/>
+          <p:nvPr/>
+        </p:nvSpPr>
+        <p:spPr>
+          <a:xfrm>
+            <a:off x="822960" y="457200"/>
+            <a:ext cx="10515600" cy="457200"/>
+          </a:xfrm>
+          <a:prstGeom prst="rect">
+            <a:avLst/>
+          </a:prstGeom>
+          <a:noFill/>
+        </p:spPr>
+        <p:txBody>
+          <a:bodyPr wrap="square" anchor="t">
+            <a:spAutoFit/>
+          </a:bodyPr>
+          <a:lstStyle/>
+          <a:p>
+            <a:pPr algn="l">
+              <a:spcAft>
+                <a:spcPts val="600"/>
+              </a:spcAft>
+            </a:pPr>
+            <a:r>
+              <a:rPr sz="1800" b="1">
+                <a:solidFill>
+                  <a:srgbClr val="C84B31"/>
+                </a:solidFill>
+                <a:latin typeface="Calibri"/>
+              </a:rPr>
+              <a:t>CIERRE</a:t>
+            </a:r>
+          </a:p>
+        </p:txBody>
+      </p:sp>
+      <p:sp>
+        <p:nvSpPr>
+          <p:cNvPr id="4" name="TextBox 3"/>
+          <p:cNvSpPr txBox="1"/>
+          <p:nvPr/>
+        </p:nvSpPr>
+        <p:spPr>
+          <a:xfrm>
+            <a:off x="822960" y="914400"/>
+            <a:ext cx="10515600" cy="822960"/>
+          </a:xfrm>
+          <a:prstGeom prst="rect">
+            <a:avLst/>
+          </a:prstGeom>
+          <a:noFill/>
+        </p:spPr>
+        <p:txBody>
+          <a:bodyPr wrap="square" anchor="t">
+            <a:spAutoFit/>
+          </a:bodyPr>
+          <a:lstStyle/>
+          <a:p>
+            <a:pPr algn="l">
+              <a:spcAft>
+                <a:spcPts val="600"/>
+              </a:spcAft>
+            </a:pPr>
+            <a:r>
+              <a:rPr sz="3600" b="1">
+                <a:solidFill>
+                  <a:srgbClr val="6D2E46"/>
+                </a:solidFill>
+                <a:latin typeface="Calibri"/>
+              </a:rPr>
+              <a:t>Lo que nos llevamos y la tarea</a:t>
+            </a:r>
+          </a:p>
+        </p:txBody>
+      </p:sp>
+      <p:sp>
+        <p:nvSpPr>
+          <p:cNvPr id="5" name="Rectangle 4"/>
+          <p:cNvSpPr/>
+          <p:nvPr/>
+        </p:nvSpPr>
+        <p:spPr>
+          <a:xfrm>
+            <a:off x="868680" y="1783080"/>
+            <a:ext cx="1554480" cy="64008"/>
+          </a:xfrm>
+          <a:prstGeom prst="rect">
+            <a:avLst/>
+          </a:prstGeom>
+          <a:solidFill>
+            <a:srgbClr val="E3B23C"/>
+          </a:solidFill>
+          <a:ln>
+            <a:noFill/>
+          </a:ln>
+          <a:effectLst/>
+        </p:spPr>
+        <p:style>
+          <a:lnRef idx="1">
+            <a:schemeClr val="accent1"/>
+          </a:lnRef>
+          <a:fillRef idx="3">
+            <a:schemeClr val="accent1"/>
+          </a:fillRef>
+          <a:effectRef idx="2">
+            <a:schemeClr val="accent1"/>
+          </a:effectRef>
+          <a:fontRef idx="minor">
+            <a:schemeClr val="lt1"/>
+          </a:fontRef>
+        </p:style>
+        <p:txBody>
+          <a:bodyPr rtlCol="0" anchor="ctr"/>
+          <a:lstStyle/>
+          <a:p>
+            <a:pPr algn="ctr"/>
+          </a:p>
+        </p:txBody>
+      </p:sp>
+      <p:sp>
+        <p:nvSpPr>
+          <p:cNvPr id="6" name="Rounded Rectangle 5"/>
+          <p:cNvSpPr/>
+          <p:nvPr/>
+        </p:nvSpPr>
+        <p:spPr>
+          <a:xfrm>
+            <a:off x="822960" y="2148840"/>
+            <a:ext cx="5257800" cy="4160520"/>
+          </a:xfrm>
+          <a:prstGeom prst="roundRect">
+            <a:avLst/>
+          </a:prstGeom>
+          <a:solidFill>
+            <a:srgbClr val="F6ECDD"/>
+          </a:solidFill>
+          <a:ln>
+            <a:noFill/>
+          </a:ln>
+          <a:effectLst/>
+        </p:spPr>
+        <p:style>
+          <a:lnRef idx="1">
+            <a:schemeClr val="accent1"/>
+          </a:lnRef>
+          <a:fillRef idx="3">
+            <a:schemeClr val="accent1"/>
+          </a:fillRef>
+          <a:effectRef idx="2">
+            <a:schemeClr val="accent1"/>
+          </a:effectRef>
+          <a:fontRef idx="minor">
+            <a:schemeClr val="lt1"/>
+          </a:fontRef>
+        </p:style>
+        <p:txBody>
+          <a:bodyPr rtlCol="0" anchor="ctr"/>
+          <a:lstStyle/>
+          <a:p>
+            <a:pPr algn="ctr"/>
+          </a:p>
+        </p:txBody>
+      </p:sp>
+      <p:sp>
+        <p:nvSpPr>
+          <p:cNvPr id="7" name="TextBox 6"/>
+          <p:cNvSpPr txBox="1"/>
+          <p:nvPr/>
+        </p:nvSpPr>
+        <p:spPr>
+          <a:xfrm>
+            <a:off x="1097280" y="2377440"/>
+            <a:ext cx="4754880" cy="457200"/>
+          </a:xfrm>
+          <a:prstGeom prst="rect">
+            <a:avLst/>
+          </a:prstGeom>
+          <a:noFill/>
+        </p:spPr>
+        <p:txBody>
+          <a:bodyPr wrap="square" anchor="t">
+            <a:spAutoFit/>
+          </a:bodyPr>
+          <a:lstStyle/>
+          <a:p>
+            <a:pPr algn="l">
+              <a:spcAft>
+                <a:spcPts val="600"/>
+              </a:spcAft>
+            </a:pPr>
+            <a:r>
+              <a:rPr sz="2200" b="1">
+                <a:solidFill>
+                  <a:srgbClr val="4F772D"/>
+                </a:solidFill>
+                <a:latin typeface="Calibri"/>
+              </a:rPr>
+              <a:t>En resumen</a:t>
+            </a:r>
+          </a:p>
+        </p:txBody>
+      </p:sp>
+      <p:sp>
+        <p:nvSpPr>
+          <p:cNvPr id="8" name="TextBox 7"/>
+          <p:cNvSpPr txBox="1"/>
+          <p:nvPr/>
+        </p:nvSpPr>
+        <p:spPr>
+          <a:xfrm>
+            <a:off x="1097280" y="2926080"/>
+            <a:ext cx="4754880" cy="3291840"/>
+          </a:xfrm>
+          <a:prstGeom prst="rect">
+            <a:avLst/>
+          </a:prstGeom>
+          <a:noFill/>
+        </p:spPr>
+        <p:txBody>
+          <a:bodyPr wrap="square">
+            <a:spAutoFit/>
+          </a:bodyPr>
+          <a:lstStyle/>
+          <a:p>
+            <a:pPr>
+              <a:spcAft>
+                <a:spcPts val="1300"/>
+              </a:spcAft>
+            </a:pPr>
+            <a:r>
+              <a:rPr sz="2000">
+                <a:solidFill>
+                  <a:srgbClr val="2B2B2B"/>
+                </a:solidFill>
+                <a:latin typeface="Calibri"/>
+              </a:rPr>
+              <a:t>•  Nativo conviene para cámara, tienda y rendimiento</a:t>
+            </a:r>
+          </a:p>
+          <a:p>
+            <a:pPr>
+              <a:spcAft>
+                <a:spcPts val="1300"/>
+              </a:spcAft>
+            </a:pPr>
+            <a:r>
+              <a:rPr sz="2000">
+                <a:solidFill>
+                  <a:srgbClr val="2B2B2B"/>
+                </a:solidFill>
+                <a:latin typeface="Calibri"/>
+              </a:rPr>
+              <a:t>•  La app nativa se construye en AI Studio, sin terminal ni SDK</a:t>
+            </a:r>
+          </a:p>
+          <a:p>
+            <a:pPr>
+              <a:spcAft>
+                <a:spcPts val="1300"/>
+              </a:spcAft>
+            </a:pPr>
+            <a:r>
+              <a:rPr sz="2000">
+                <a:solidFill>
+                  <a:srgbClr val="2B2B2B"/>
+                </a:solidFill>
+                <a:latin typeface="Calibri"/>
+              </a:rPr>
+              <a:t>•  La IA construye nativo (Kotlin + Compose) igual que la PWA</a:t>
+            </a:r>
+          </a:p>
+        </p:txBody>
+      </p:sp>
+      <p:sp>
+        <p:nvSpPr>
+          <p:cNvPr id="9" name="Rounded Rectangle 8"/>
+          <p:cNvSpPr/>
+          <p:nvPr/>
+        </p:nvSpPr>
+        <p:spPr>
+          <a:xfrm>
+            <a:off x="6263640" y="2148840"/>
+            <a:ext cx="5120640" cy="4160520"/>
+          </a:xfrm>
+          <a:prstGeom prst="roundRect">
+            <a:avLst/>
+          </a:prstGeom>
+          <a:solidFill>
+            <a:srgbClr val="F6ECDD"/>
+          </a:solidFill>
+          <a:ln>
+            <a:noFill/>
+          </a:ln>
+          <a:effectLst/>
+        </p:spPr>
+        <p:style>
+          <a:lnRef idx="1">
+            <a:schemeClr val="accent1"/>
+          </a:lnRef>
+          <a:fillRef idx="3">
+            <a:schemeClr val="accent1"/>
+          </a:fillRef>
+          <a:effectRef idx="2">
+            <a:schemeClr val="accent1"/>
+          </a:effectRef>
+          <a:fontRef idx="minor">
+            <a:schemeClr val="lt1"/>
+          </a:fontRef>
+        </p:style>
+        <p:txBody>
+          <a:bodyPr rtlCol="0" anchor="ctr"/>
+          <a:lstStyle/>
+          <a:p>
+            <a:pPr algn="ctr"/>
+          </a:p>
+        </p:txBody>
+      </p:sp>
+      <p:sp>
+        <p:nvSpPr>
+          <p:cNvPr id="10" name="TextBox 9"/>
+          <p:cNvSpPr txBox="1"/>
+          <p:nvPr/>
+        </p:nvSpPr>
+        <p:spPr>
+          <a:xfrm>
+            <a:off x="6537960" y="2377440"/>
+            <a:ext cx="4572000" cy="457200"/>
+          </a:xfrm>
+          <a:prstGeom prst="rect">
+            <a:avLst/>
+          </a:prstGeom>
+          <a:noFill/>
+        </p:spPr>
+        <p:txBody>
+          <a:bodyPr wrap="square" anchor="t">
+            <a:spAutoFit/>
+          </a:bodyPr>
+          <a:lstStyle/>
+          <a:p>
+            <a:pPr algn="l">
+              <a:spcAft>
+                <a:spcPts val="600"/>
+              </a:spcAft>
+            </a:pPr>
+            <a:r>
+              <a:rPr sz="2200" b="1">
+                <a:solidFill>
+                  <a:srgbClr val="C84B31"/>
+                </a:solidFill>
+                <a:latin typeface="Calibri"/>
+              </a:rPr>
+              <a:t>Para la próxima</a:t>
+            </a:r>
+          </a:p>
+        </p:txBody>
+      </p:sp>
+      <p:sp>
+        <p:nvSpPr>
+          <p:cNvPr id="11" name="TextBox 10"/>
+          <p:cNvSpPr txBox="1"/>
+          <p:nvPr/>
+        </p:nvSpPr>
+        <p:spPr>
+          <a:xfrm>
+            <a:off x="6537960" y="2926080"/>
+            <a:ext cx="4572000" cy="3291840"/>
+          </a:xfrm>
+          <a:prstGeom prst="rect">
+            <a:avLst/>
+          </a:prstGeom>
+          <a:noFill/>
+        </p:spPr>
+        <p:txBody>
+          <a:bodyPr wrap="square">
+            <a:spAutoFit/>
+          </a:bodyPr>
+          <a:lstStyle/>
+          <a:p>
+            <a:pPr>
+              <a:spcAft>
+                <a:spcPts val="1300"/>
+              </a:spcAft>
+            </a:pPr>
+            <a:r>
+              <a:rPr sz="2000">
+                <a:solidFill>
+                  <a:srgbClr val="2B2B2B"/>
+                </a:solidFill>
+                <a:latin typeface="Calibri"/>
+              </a:rPr>
+              <a:t>•  Tarea 4: investigación PWA vs nativo</a:t>
+            </a:r>
+          </a:p>
+          <a:p>
+            <a:pPr>
+              <a:spcAft>
+                <a:spcPts val="1300"/>
+              </a:spcAft>
+            </a:pPr>
+            <a:r>
+              <a:rPr sz="2000">
+                <a:solidFill>
+                  <a:srgbClr val="2B2B2B"/>
+                </a:solidFill>
+                <a:latin typeface="Calibri"/>
+              </a:rPr>
+              <a:t>•  Laboratorio 4: app nativa en el emulador del navegador con su cuadrícula</a:t>
+            </a:r>
+          </a:p>
+          <a:p>
+            <a:pPr>
+              <a:spcAft>
+                <a:spcPts val="1300"/>
+              </a:spcAft>
+            </a:pPr>
+            <a:r>
+              <a:rPr sz="2000">
+                <a:solidFill>
+                  <a:srgbClr val="2B2B2B"/>
+                </a:solidFill>
+                <a:latin typeface="Calibri"/>
+              </a:rPr>
+              <a:t>•  Examen Parcial en la próxima sesión: escrito en línea + entrega del Proyecto 1</a:t>
             </a:r>
           </a:p>
         </p:txBody>
@@ -4581,7 +5380,7 @@
             <a:avLst/>
           </a:prstGeom>
           <a:solidFill>
-            <a:srgbClr val="E3B23C"/>
+            <a:srgbClr val="C84B31"/>
           </a:solidFill>
           <a:ln>
             <a:noFill/>
@@ -4644,7 +5443,7 @@
                 </a:solidFill>
                 <a:latin typeface="Calibri"/>
               </a:rPr>
-              <a:t>CUÁNDO CADA UNA</a:t>
+              <a:t>VOCABULARIO DE DISEÑO, NO PROGRAMACIÓN</a:t>
             </a:r>
           </a:p>
         </p:txBody>
@@ -4683,7 +5482,7 @@
                 </a:solidFill>
                 <a:latin typeface="Calibri"/>
               </a:rPr>
-              <a:t>PWA vs app nativa</a:t>
+              <a:t>Estructura de una app Android y su tema (Material 3)</a:t>
             </a:r>
           </a:p>
         </p:txBody>
@@ -4734,187 +5533,14 @@
       </p:sp>
       <p:sp>
         <p:nvSpPr>
-          <p:cNvPr id="6" name="Rounded Rectangle 5"/>
-          <p:cNvSpPr/>
-          <p:nvPr/>
-        </p:nvSpPr>
-        <p:spPr>
-          <a:xfrm>
-            <a:off x="868680" y="2148840"/>
-            <a:ext cx="5074920" cy="4206240"/>
-          </a:xfrm>
-          <a:prstGeom prst="roundRect">
-            <a:avLst/>
-          </a:prstGeom>
-          <a:solidFill>
-            <a:srgbClr val="FFFFFF"/>
-          </a:solidFill>
-          <a:ln w="15240">
-            <a:solidFill>
-              <a:srgbClr val="EADDC8"/>
-            </a:solidFill>
-          </a:ln>
-          <a:effectLst/>
-        </p:spPr>
-        <p:style>
-          <a:lnRef idx="1">
-            <a:schemeClr val="accent1"/>
-          </a:lnRef>
-          <a:fillRef idx="3">
-            <a:schemeClr val="accent1"/>
-          </a:fillRef>
-          <a:effectRef idx="2">
-            <a:schemeClr val="accent1"/>
-          </a:effectRef>
-          <a:fontRef idx="minor">
-            <a:schemeClr val="lt1"/>
-          </a:fontRef>
-        </p:style>
-        <p:txBody>
-          <a:bodyPr rtlCol="0" anchor="ctr"/>
-          <a:lstStyle/>
-          <a:p>
-            <a:pPr algn="ctr"/>
-          </a:p>
-        </p:txBody>
-      </p:sp>
-      <p:sp>
-        <p:nvSpPr>
-          <p:cNvPr id="7" name="Rounded Rectangle 6"/>
-          <p:cNvSpPr/>
-          <p:nvPr/>
-        </p:nvSpPr>
-        <p:spPr>
-          <a:xfrm>
-            <a:off x="868680" y="2148840"/>
-            <a:ext cx="5074920" cy="777240"/>
-          </a:xfrm>
-          <a:prstGeom prst="roundRect">
-            <a:avLst/>
-          </a:prstGeom>
-          <a:solidFill>
-            <a:srgbClr val="3A6B7E"/>
-          </a:solidFill>
-          <a:ln>
-            <a:noFill/>
-          </a:ln>
-          <a:effectLst/>
-        </p:spPr>
-        <p:style>
-          <a:lnRef idx="1">
-            <a:schemeClr val="accent1"/>
-          </a:lnRef>
-          <a:fillRef idx="3">
-            <a:schemeClr val="accent1"/>
-          </a:fillRef>
-          <a:effectRef idx="2">
-            <a:schemeClr val="accent1"/>
-          </a:effectRef>
-          <a:fontRef idx="minor">
-            <a:schemeClr val="lt1"/>
-          </a:fontRef>
-        </p:style>
-        <p:txBody>
-          <a:bodyPr rtlCol="0" anchor="ctr"/>
-          <a:lstStyle/>
-          <a:p>
-            <a:pPr algn="ctr"/>
-          </a:p>
-        </p:txBody>
-      </p:sp>
-      <p:sp>
-        <p:nvSpPr>
-          <p:cNvPr id="8" name="Rectangle 7"/>
-          <p:cNvSpPr/>
-          <p:nvPr/>
-        </p:nvSpPr>
-        <p:spPr>
-          <a:xfrm>
-            <a:off x="868680" y="2606040"/>
-            <a:ext cx="5074920" cy="320040"/>
-          </a:xfrm>
-          <a:prstGeom prst="rect">
-            <a:avLst/>
-          </a:prstGeom>
-          <a:solidFill>
-            <a:srgbClr val="3A6B7E"/>
-          </a:solidFill>
-          <a:ln>
-            <a:noFill/>
-          </a:ln>
-          <a:effectLst/>
-        </p:spPr>
-        <p:style>
-          <a:lnRef idx="1">
-            <a:schemeClr val="accent1"/>
-          </a:lnRef>
-          <a:fillRef idx="3">
-            <a:schemeClr val="accent1"/>
-          </a:fillRef>
-          <a:effectRef idx="2">
-            <a:schemeClr val="accent1"/>
-          </a:effectRef>
-          <a:fontRef idx="minor">
-            <a:schemeClr val="lt1"/>
-          </a:fontRef>
-        </p:style>
-        <p:txBody>
-          <a:bodyPr rtlCol="0" anchor="ctr"/>
-          <a:lstStyle/>
-          <a:p>
-            <a:pPr algn="ctr"/>
-          </a:p>
-        </p:txBody>
-      </p:sp>
-      <p:sp>
-        <p:nvSpPr>
-          <p:cNvPr id="9" name="TextBox 8"/>
+          <p:cNvPr id="6" name="TextBox 5"/>
           <p:cNvSpPr txBox="1"/>
           <p:nvPr/>
         </p:nvSpPr>
         <p:spPr>
           <a:xfrm>
-            <a:off x="1188720" y="2258568"/>
-            <a:ext cx="4526280" cy="640080"/>
-          </a:xfrm>
-          <a:prstGeom prst="rect">
-            <a:avLst/>
-          </a:prstGeom>
-          <a:noFill/>
-        </p:spPr>
-        <p:txBody>
-          <a:bodyPr wrap="square" anchor="ctr">
-            <a:spAutoFit/>
-          </a:bodyPr>
-          <a:lstStyle/>
-          <a:p>
-            <a:pPr algn="l">
-              <a:spcAft>
-                <a:spcPts val="600"/>
-              </a:spcAft>
-            </a:pPr>
-            <a:r>
-              <a:rPr sz="2400" b="1">
-                <a:solidFill>
-                  <a:srgbClr val="FFFFFF"/>
-                </a:solidFill>
-                <a:latin typeface="Calibri"/>
-              </a:rPr>
-              <a:t>PWA</a:t>
-            </a:r>
-          </a:p>
-        </p:txBody>
-      </p:sp>
-      <p:sp>
-        <p:nvSpPr>
-          <p:cNvPr id="10" name="TextBox 9"/>
-          <p:cNvSpPr txBox="1"/>
-          <p:nvPr/>
-        </p:nvSpPr>
-        <p:spPr>
-          <a:xfrm>
-            <a:off x="1188720" y="3154680"/>
-            <a:ext cx="4434840" cy="3017520"/>
+            <a:off x="896112" y="2103120"/>
+            <a:ext cx="10515600" cy="4480560"/>
           </a:xfrm>
           <a:prstGeom prst="rect">
             <a:avLst/>
@@ -4929,357 +5555,81 @@
           <a:p>
             <a:pPr>
               <a:spcAft>
-                <a:spcPts val="1200"/>
-              </a:spcAft>
-            </a:pPr>
-            <a:r>
-              <a:rPr sz="1900">
+                <a:spcPts val="1500"/>
+              </a:spcAft>
+            </a:pPr>
+            <a:r>
+              <a:rPr sz="2300">
                 <a:solidFill>
                   <a:srgbClr val="2B2B2B"/>
                 </a:solidFill>
                 <a:latin typeface="Calibri"/>
               </a:rPr>
-              <a:t>•  Vive en el navegador</a:t>
+              <a:t>•  El tema (theme) reúne colores, tipografías y formas: es el sistema visual de toda la app</a:t>
             </a:r>
           </a:p>
           <a:p>
             <a:pPr>
               <a:spcAft>
-                <a:spcPts val="1200"/>
-              </a:spcAft>
-            </a:pPr>
-            <a:r>
-              <a:rPr sz="1900">
+                <a:spcPts val="1500"/>
+              </a:spcAft>
+            </a:pPr>
+            <a:r>
+              <a:rPr sz="2300">
                 <a:solidFill>
                   <a:srgbClr val="2B2B2B"/>
                 </a:solidFill>
                 <a:latin typeface="Calibri"/>
               </a:rPr>
-              <a:t>•  Se instala desde una URL</a:t>
+              <a:t>•  El color scheme de Material 3 —primario, secundario, fondo, superficie— es donde va tu paleta de marca</a:t>
             </a:r>
           </a:p>
           <a:p>
             <a:pPr>
               <a:spcAft>
-                <a:spcPts val="1200"/>
-              </a:spcAft>
-            </a:pPr>
-            <a:r>
-              <a:rPr sz="1900">
+                <a:spcPts val="1500"/>
+              </a:spcAft>
+            </a:pPr>
+            <a:r>
+              <a:rPr sz="2300">
                 <a:solidFill>
                   <a:srgbClr val="2B2B2B"/>
                 </a:solidFill>
                 <a:latin typeface="Calibri"/>
               </a:rPr>
-              <a:t>•  Alcance y velocidad de publicación</a:t>
+              <a:t>•  Las pantallas (screens) y los componentes (Compose) se organizan en archivos separados</a:t>
             </a:r>
           </a:p>
           <a:p>
             <a:pPr>
               <a:spcAft>
-                <a:spcPts val="1200"/>
-              </a:spcAft>
-            </a:pPr>
-            <a:r>
-              <a:rPr sz="1900">
+                <a:spcPts val="1500"/>
+              </a:spcAft>
+            </a:pPr>
+            <a:r>
+              <a:rPr sz="2300">
                 <a:solidFill>
                   <a:srgbClr val="2B2B2B"/>
                 </a:solidFill>
                 <a:latin typeface="Calibri"/>
               </a:rPr>
-              <a:t>•  Ideal para catálogos y contenido</a:t>
+              <a:t>•  Los recursos —íconos, colores, textos— viven aparte para poder reutilizarse</a:t>
             </a:r>
           </a:p>
           <a:p>
             <a:pPr>
               <a:spcAft>
-                <a:spcPts val="1200"/>
-              </a:spcAft>
-            </a:pPr>
-            <a:r>
-              <a:rPr sz="1900">
+                <a:spcPts val="1500"/>
+              </a:spcAft>
+            </a:pPr>
+            <a:r>
+              <a:rPr sz="2300">
                 <a:solidFill>
                   <a:srgbClr val="2B2B2B"/>
                 </a:solidFill>
                 <a:latin typeface="Calibri"/>
               </a:rPr>
-              <a:t>•  Una base de código para todos</a:t>
-            </a:r>
-          </a:p>
-        </p:txBody>
-      </p:sp>
-      <p:sp>
-        <p:nvSpPr>
-          <p:cNvPr id="11" name="Rounded Rectangle 10"/>
-          <p:cNvSpPr/>
-          <p:nvPr/>
-        </p:nvSpPr>
-        <p:spPr>
-          <a:xfrm>
-            <a:off x="6263640" y="2148840"/>
-            <a:ext cx="5074920" cy="4206240"/>
-          </a:xfrm>
-          <a:prstGeom prst="roundRect">
-            <a:avLst/>
-          </a:prstGeom>
-          <a:solidFill>
-            <a:srgbClr val="FFFFFF"/>
-          </a:solidFill>
-          <a:ln w="15240">
-            <a:solidFill>
-              <a:srgbClr val="EADDC8"/>
-            </a:solidFill>
-          </a:ln>
-          <a:effectLst/>
-        </p:spPr>
-        <p:style>
-          <a:lnRef idx="1">
-            <a:schemeClr val="accent1"/>
-          </a:lnRef>
-          <a:fillRef idx="3">
-            <a:schemeClr val="accent1"/>
-          </a:fillRef>
-          <a:effectRef idx="2">
-            <a:schemeClr val="accent1"/>
-          </a:effectRef>
-          <a:fontRef idx="minor">
-            <a:schemeClr val="lt1"/>
-          </a:fontRef>
-        </p:style>
-        <p:txBody>
-          <a:bodyPr rtlCol="0" anchor="ctr"/>
-          <a:lstStyle/>
-          <a:p>
-            <a:pPr algn="ctr"/>
-          </a:p>
-        </p:txBody>
-      </p:sp>
-      <p:sp>
-        <p:nvSpPr>
-          <p:cNvPr id="12" name="Rounded Rectangle 11"/>
-          <p:cNvSpPr/>
-          <p:nvPr/>
-        </p:nvSpPr>
-        <p:spPr>
-          <a:xfrm>
-            <a:off x="6263640" y="2148840"/>
-            <a:ext cx="5074920" cy="777240"/>
-          </a:xfrm>
-          <a:prstGeom prst="roundRect">
-            <a:avLst/>
-          </a:prstGeom>
-          <a:solidFill>
-            <a:srgbClr val="6D2E46"/>
-          </a:solidFill>
-          <a:ln>
-            <a:noFill/>
-          </a:ln>
-          <a:effectLst/>
-        </p:spPr>
-        <p:style>
-          <a:lnRef idx="1">
-            <a:schemeClr val="accent1"/>
-          </a:lnRef>
-          <a:fillRef idx="3">
-            <a:schemeClr val="accent1"/>
-          </a:fillRef>
-          <a:effectRef idx="2">
-            <a:schemeClr val="accent1"/>
-          </a:effectRef>
-          <a:fontRef idx="minor">
-            <a:schemeClr val="lt1"/>
-          </a:fontRef>
-        </p:style>
-        <p:txBody>
-          <a:bodyPr rtlCol="0" anchor="ctr"/>
-          <a:lstStyle/>
-          <a:p>
-            <a:pPr algn="ctr"/>
-          </a:p>
-        </p:txBody>
-      </p:sp>
-      <p:sp>
-        <p:nvSpPr>
-          <p:cNvPr id="13" name="Rectangle 12"/>
-          <p:cNvSpPr/>
-          <p:nvPr/>
-        </p:nvSpPr>
-        <p:spPr>
-          <a:xfrm>
-            <a:off x="6263640" y="2606040"/>
-            <a:ext cx="5074920" cy="320040"/>
-          </a:xfrm>
-          <a:prstGeom prst="rect">
-            <a:avLst/>
-          </a:prstGeom>
-          <a:solidFill>
-            <a:srgbClr val="6D2E46"/>
-          </a:solidFill>
-          <a:ln>
-            <a:noFill/>
-          </a:ln>
-          <a:effectLst/>
-        </p:spPr>
-        <p:style>
-          <a:lnRef idx="1">
-            <a:schemeClr val="accent1"/>
-          </a:lnRef>
-          <a:fillRef idx="3">
-            <a:schemeClr val="accent1"/>
-          </a:fillRef>
-          <a:effectRef idx="2">
-            <a:schemeClr val="accent1"/>
-          </a:effectRef>
-          <a:fontRef idx="minor">
-            <a:schemeClr val="lt1"/>
-          </a:fontRef>
-        </p:style>
-        <p:txBody>
-          <a:bodyPr rtlCol="0" anchor="ctr"/>
-          <a:lstStyle/>
-          <a:p>
-            <a:pPr algn="ctr"/>
-          </a:p>
-        </p:txBody>
-      </p:sp>
-      <p:sp>
-        <p:nvSpPr>
-          <p:cNvPr id="14" name="TextBox 13"/>
-          <p:cNvSpPr txBox="1"/>
-          <p:nvPr/>
-        </p:nvSpPr>
-        <p:spPr>
-          <a:xfrm>
-            <a:off x="6583680" y="2258568"/>
-            <a:ext cx="4526280" cy="640080"/>
-          </a:xfrm>
-          <a:prstGeom prst="rect">
-            <a:avLst/>
-          </a:prstGeom>
-          <a:noFill/>
-        </p:spPr>
-        <p:txBody>
-          <a:bodyPr wrap="square" anchor="ctr">
-            <a:spAutoFit/>
-          </a:bodyPr>
-          <a:lstStyle/>
-          <a:p>
-            <a:pPr algn="l">
-              <a:spcAft>
-                <a:spcPts val="600"/>
-              </a:spcAft>
-            </a:pPr>
-            <a:r>
-              <a:rPr sz="2400" b="1">
-                <a:solidFill>
-                  <a:srgbClr val="FFFFFF"/>
-                </a:solidFill>
-                <a:latin typeface="Calibri"/>
-              </a:rPr>
-              <a:t>Nativa (Android)</a:t>
-            </a:r>
-          </a:p>
-        </p:txBody>
-      </p:sp>
-      <p:sp>
-        <p:nvSpPr>
-          <p:cNvPr id="15" name="TextBox 14"/>
-          <p:cNvSpPr txBox="1"/>
-          <p:nvPr/>
-        </p:nvSpPr>
-        <p:spPr>
-          <a:xfrm>
-            <a:off x="6583680" y="3154680"/>
-            <a:ext cx="4434840" cy="3017520"/>
-          </a:xfrm>
-          <a:prstGeom prst="rect">
-            <a:avLst/>
-          </a:prstGeom>
-          <a:noFill/>
-        </p:spPr>
-        <p:txBody>
-          <a:bodyPr wrap="square">
-            <a:spAutoFit/>
-          </a:bodyPr>
-          <a:lstStyle/>
-          <a:p>
-            <a:pPr>
-              <a:spcAft>
-                <a:spcPts val="1200"/>
-              </a:spcAft>
-            </a:pPr>
-            <a:r>
-              <a:rPr sz="1900">
-                <a:solidFill>
-                  <a:srgbClr val="2B2B2B"/>
-                </a:solidFill>
-                <a:latin typeface="Calibri"/>
-              </a:rPr>
-              <a:t>•  Se instala desde la tienda (Play Store)</a:t>
-            </a:r>
-          </a:p>
-          <a:p>
-            <a:pPr>
-              <a:spcAft>
-                <a:spcPts val="1200"/>
-              </a:spcAft>
-            </a:pPr>
-            <a:r>
-              <a:rPr sz="1900">
-                <a:solidFill>
-                  <a:srgbClr val="2B2B2B"/>
-                </a:solidFill>
-                <a:latin typeface="Calibri"/>
-              </a:rPr>
-              <a:t>•  Mejor acceso al teléfono: cámara, sensores</a:t>
-            </a:r>
-          </a:p>
-          <a:p>
-            <a:pPr>
-              <a:spcAft>
-                <a:spcPts val="1200"/>
-              </a:spcAft>
-            </a:pPr>
-            <a:r>
-              <a:rPr sz="1900">
-                <a:solidFill>
-                  <a:srgbClr val="2B2B2B"/>
-                </a:solidFill>
-                <a:latin typeface="Calibri"/>
-              </a:rPr>
-              <a:t>•  Presencia y descubrimiento en la tienda</a:t>
-            </a:r>
-          </a:p>
-          <a:p>
-            <a:pPr>
-              <a:spcAft>
-                <a:spcPts val="1200"/>
-              </a:spcAft>
-            </a:pPr>
-            <a:r>
-              <a:rPr sz="1900">
-                <a:solidFill>
-                  <a:srgbClr val="2B2B2B"/>
-                </a:solidFill>
-                <a:latin typeface="Calibri"/>
-              </a:rPr>
-              <a:t>•  Ideal para herramientas que capturan</a:t>
-            </a:r>
-          </a:p>
-          <a:p>
-            <a:pPr>
-              <a:spcAft>
-                <a:spcPts val="1200"/>
-              </a:spcAft>
-            </a:pPr>
-            <a:r>
-              <a:rPr sz="1900">
-                <a:solidFill>
-                  <a:srgbClr val="2B2B2B"/>
-                </a:solidFill>
-                <a:latin typeface="Calibri"/>
-              </a:rPr>
-              <a:t>•  Rendimiento y experiencia más ricos</a:t>
+              <a:t>•  Cambias el tema una vez y toda la app se ve consistente; lo diriges con prompts</a:t>
             </a:r>
           </a:p>
         </p:txBody>
@@ -5325,7 +5675,7 @@
             <a:avLst/>
           </a:prstGeom>
           <a:solidFill>
-            <a:srgbClr val="C84B31"/>
+            <a:srgbClr val="4F772D"/>
           </a:solidFill>
           <a:ln>
             <a:noFill/>
@@ -5388,7 +5738,7 @@
                 </a:solidFill>
                 <a:latin typeface="Calibri"/>
               </a:rPr>
-              <a:t>A DÓNDE LLEGAMOS</a:t>
+              <a:t>DEMO DEL DOCENTE · EN VIVO</a:t>
             </a:r>
           </a:p>
         </p:txBody>
@@ -5427,7 +5777,7 @@
                 </a:solidFill>
                 <a:latin typeface="Calibri"/>
               </a:rPr>
-              <a:t>Bitácora Visual en el emulador del navegador</a:t>
+              <a:t>Mi Estantería</a:t>
             </a:r>
           </a:p>
         </p:txBody>
@@ -5484,8 +5834,201 @@
         </p:nvSpPr>
         <p:spPr>
           <a:xfrm>
-            <a:off x="9134856" y="1819655"/>
-            <a:ext cx="2053369" cy="4315968"/>
+            <a:off x="896112" y="2148840"/>
+            <a:ext cx="6583680" cy="566928"/>
+          </a:xfrm>
+          <a:prstGeom prst="roundRect">
+            <a:avLst/>
+          </a:prstGeom>
+          <a:solidFill>
+            <a:srgbClr val="F6ECDD"/>
+          </a:solidFill>
+          <a:ln>
+            <a:noFill/>
+          </a:ln>
+          <a:effectLst/>
+        </p:spPr>
+        <p:style>
+          <a:lnRef idx="1">
+            <a:schemeClr val="accent1"/>
+          </a:lnRef>
+          <a:fillRef idx="3">
+            <a:schemeClr val="accent1"/>
+          </a:fillRef>
+          <a:effectRef idx="2">
+            <a:schemeClr val="accent1"/>
+          </a:effectRef>
+          <a:fontRef idx="minor">
+            <a:schemeClr val="lt1"/>
+          </a:fontRef>
+        </p:style>
+        <p:txBody>
+          <a:bodyPr rtlCol="0" anchor="ctr"/>
+          <a:lstStyle/>
+          <a:p>
+            <a:pPr algn="ctr"/>
+          </a:p>
+        </p:txBody>
+      </p:sp>
+      <p:sp>
+        <p:nvSpPr>
+          <p:cNvPr id="7" name="TextBox 6"/>
+          <p:cNvSpPr txBox="1"/>
+          <p:nvPr/>
+        </p:nvSpPr>
+        <p:spPr>
+          <a:xfrm>
+            <a:off x="1170432" y="2240280"/>
+            <a:ext cx="6035040" cy="457200"/>
+          </a:xfrm>
+          <a:prstGeom prst="rect">
+            <a:avLst/>
+          </a:prstGeom>
+          <a:noFill/>
+        </p:spPr>
+        <p:txBody>
+          <a:bodyPr wrap="square" anchor="ctr">
+            <a:spAutoFit/>
+          </a:bodyPr>
+          <a:lstStyle/>
+          <a:p>
+            <a:pPr algn="l">
+              <a:spcAft>
+                <a:spcPts val="600"/>
+              </a:spcAft>
+            </a:pPr>
+            <a:r>
+              <a:rPr sz="1700" b="1">
+                <a:solidFill>
+                  <a:srgbClr val="6D2E46"/>
+                </a:solidFill>
+                <a:latin typeface="Calibri"/>
+              </a:rPr>
+              <a:t>El docente la construye en vivo — no es tu entrega</a:t>
+            </a:r>
+          </a:p>
+        </p:txBody>
+      </p:sp>
+      <p:sp>
+        <p:nvSpPr>
+          <p:cNvPr id="8" name="TextBox 7"/>
+          <p:cNvSpPr txBox="1"/>
+          <p:nvPr/>
+        </p:nvSpPr>
+        <p:spPr>
+          <a:xfrm>
+            <a:off x="896112" y="2971800"/>
+            <a:ext cx="6583680" cy="2103120"/>
+          </a:xfrm>
+          <a:prstGeom prst="rect">
+            <a:avLst/>
+          </a:prstGeom>
+          <a:noFill/>
+        </p:spPr>
+        <p:txBody>
+          <a:bodyPr wrap="square">
+            <a:spAutoFit/>
+          </a:bodyPr>
+          <a:lstStyle/>
+          <a:p>
+            <a:pPr>
+              <a:spcAft>
+                <a:spcPts val="1400"/>
+              </a:spcAft>
+            </a:pPr>
+            <a:r>
+              <a:rPr sz="2200">
+                <a:solidFill>
+                  <a:srgbClr val="2B2B2B"/>
+                </a:solidFill>
+                <a:latin typeface="Calibri"/>
+              </a:rPr>
+              <a:t>•  Registro de libros leídos, app nativa de Android (Kotlin + Compose)</a:t>
+            </a:r>
+          </a:p>
+          <a:p>
+            <a:pPr>
+              <a:spcAft>
+                <a:spcPts val="1400"/>
+              </a:spcAft>
+            </a:pPr>
+            <a:r>
+              <a:rPr sz="2200">
+                <a:solidFill>
+                  <a:srgbClr val="2B2B2B"/>
+                </a:solidFill>
+                <a:latin typeface="Calibri"/>
+              </a:rPr>
+              <a:t>•  Ilustra Material 3 como vocabulario de diseño y el emulador del navegador</a:t>
+            </a:r>
+          </a:p>
+          <a:p>
+            <a:pPr>
+              <a:spcAft>
+                <a:spcPts val="1400"/>
+              </a:spcAft>
+            </a:pPr>
+            <a:r>
+              <a:rPr sz="2200">
+                <a:solidFill>
+                  <a:srgbClr val="2B2B2B"/>
+                </a:solidFill>
+                <a:latin typeface="Calibri"/>
+              </a:rPr>
+              <a:t>•  El docente la genera en vivo y la prueba con "Install on Device"</a:t>
+            </a:r>
+          </a:p>
+        </p:txBody>
+      </p:sp>
+      <p:sp>
+        <p:nvSpPr>
+          <p:cNvPr id="9" name="TextBox 8"/>
+          <p:cNvSpPr txBox="1"/>
+          <p:nvPr/>
+        </p:nvSpPr>
+        <p:spPr>
+          <a:xfrm>
+            <a:off x="896112" y="5257800"/>
+            <a:ext cx="6583680" cy="1188720"/>
+          </a:xfrm>
+          <a:prstGeom prst="rect">
+            <a:avLst/>
+          </a:prstGeom>
+          <a:noFill/>
+        </p:spPr>
+        <p:txBody>
+          <a:bodyPr wrap="square" anchor="t">
+            <a:spAutoFit/>
+          </a:bodyPr>
+          <a:lstStyle/>
+          <a:p>
+            <a:pPr algn="l">
+              <a:spcAft>
+                <a:spcPts val="600"/>
+              </a:spcAft>
+            </a:pPr>
+            <a:r>
+              <a:rPr sz="1500" b="0">
+                <a:solidFill>
+                  <a:srgbClr val="6F645B"/>
+                </a:solidFill>
+                <a:latin typeface="Calibri"/>
+              </a:rPr>
+              <a:t>Ilustra el concepto del día con una app distinta. Tu laboratorio sigue en la app insignia y en tu propia idea.</a:t>
+            </a:r>
+          </a:p>
+        </p:txBody>
+      </p:sp>
+      <p:sp>
+        <p:nvSpPr>
+          <p:cNvPr id="10" name="Rounded Rectangle 9"/>
+          <p:cNvSpPr/>
+          <p:nvPr/>
+        </p:nvSpPr>
+        <p:spPr>
+          <a:xfrm>
+            <a:off x="8534739" y="2057400"/>
+            <a:ext cx="2224362" cy="4389120"/>
           </a:xfrm>
           <a:prstGeom prst="roundRect">
             <a:avLst/>
@@ -5524,7 +6067,7 @@
       </p:sp>
       <p:pic>
         <p:nvPicPr>
-          <p:cNvPr id="7" name="Picture 6" descr="bitacora-grid.png"/>
+          <p:cNvPr id="11" name="Picture 10" descr="demo-estanteria.png"/>
           <p:cNvPicPr>
             <a:picLocks noChangeAspect="1"/>
           </p:cNvPicPr>
@@ -5538,8 +6081,8 @@
         </p:blipFill>
         <p:spPr>
           <a:xfrm>
-            <a:off x="9189720" y="1874519"/>
-            <a:ext cx="1943642" cy="4206240"/>
+            <a:off x="8580459" y="2103120"/>
+            <a:ext cx="2132922" cy="4297680"/>
           </a:xfrm>
           <a:prstGeom prst="rect">
             <a:avLst/>
@@ -5548,14 +6091,14 @@
       </p:pic>
       <p:sp>
         <p:nvSpPr>
-          <p:cNvPr id="8" name="TextBox 7"/>
+          <p:cNvPr id="12" name="TextBox 11"/>
           <p:cNvSpPr txBox="1"/>
           <p:nvPr/>
         </p:nvSpPr>
         <p:spPr>
           <a:xfrm>
-            <a:off x="8366760" y="6208775"/>
-            <a:ext cx="3589561" cy="457200"/>
+            <a:off x="7818120" y="6419088"/>
+            <a:ext cx="3657600" cy="365760"/>
           </a:xfrm>
           <a:prstGeom prst="rect">
             <a:avLst/>
@@ -5574,100 +6117,13 @@
               </a:spcAft>
             </a:pPr>
             <a:r>
-              <a:rPr sz="1300" b="1">
+              <a:rPr sz="1200" b="1">
                 <a:solidFill>
                   <a:srgbClr val="6D2E46"/>
                 </a:solidFill>
                 <a:latin typeface="Calibri"/>
               </a:rPr>
-              <a:t>Nativa, en el emulador del navegador</a:t>
-            </a:r>
-          </a:p>
-        </p:txBody>
-      </p:sp>
-      <p:sp>
-        <p:nvSpPr>
-          <p:cNvPr id="9" name="TextBox 8"/>
-          <p:cNvSpPr txBox="1"/>
-          <p:nvPr/>
-        </p:nvSpPr>
-        <p:spPr>
-          <a:xfrm>
-            <a:off x="896112" y="2286000"/>
-            <a:ext cx="7680960" cy="4023360"/>
-          </a:xfrm>
-          <a:prstGeom prst="rect">
-            <a:avLst/>
-          </a:prstGeom>
-          <a:noFill/>
-        </p:spPr>
-        <p:txBody>
-          <a:bodyPr wrap="square">
-            <a:spAutoFit/>
-          </a:bodyPr>
-          <a:lstStyle/>
-          <a:p>
-            <a:pPr>
-              <a:spcAft>
-                <a:spcPts val="1500"/>
-              </a:spcAft>
-            </a:pPr>
-            <a:r>
-              <a:rPr sz="2200">
-                <a:solidFill>
-                  <a:srgbClr val="2B2B2B"/>
-                </a:solidFill>
-                <a:latin typeface="Calibri"/>
-              </a:rPr>
-              <a:t>•  Es una app nativa (Kotlin + Compose), pero tú la diriges con prompts</a:t>
-            </a:r>
-          </a:p>
-          <a:p>
-            <a:pPr>
-              <a:spcAft>
-                <a:spcPts val="1500"/>
-              </a:spcAft>
-            </a:pPr>
-            <a:r>
-              <a:rPr sz="2200">
-                <a:solidFill>
-                  <a:srgbClr val="2B2B2B"/>
-                </a:solidFill>
-                <a:latin typeface="Calibri"/>
-              </a:rPr>
-              <a:t>•  El emulador del navegador la muestra al instante</a:t>
-            </a:r>
-          </a:p>
-          <a:p>
-            <a:pPr>
-              <a:spcAft>
-                <a:spcPts val="1500"/>
-              </a:spcAft>
-            </a:pPr>
-            <a:r>
-              <a:rPr sz="2200">
-                <a:solidFill>
-                  <a:srgbClr val="2B2B2B"/>
-                </a:solidFill>
-                <a:latin typeface="Calibri"/>
-              </a:rPr>
-              <a:t>•  Cuadrícula de entradas con la estética de tu marca</a:t>
-            </a:r>
-          </a:p>
-          <a:p>
-            <a:pPr>
-              <a:spcAft>
-                <a:spcPts val="1500"/>
-              </a:spcAft>
-            </a:pPr>
-            <a:r>
-              <a:rPr sz="2200">
-                <a:solidFill>
-                  <a:srgbClr val="2B2B2B"/>
-                </a:solidFill>
-                <a:latin typeface="Calibri"/>
-              </a:rPr>
-              <a:t>•  Con "Install on Device" la instalas en tu teléfono por USB</a:t>
+              <a:t>Captura real de la demo</a:t>
             </a:r>
           </a:p>
         </p:txBody>
@@ -5700,14 +6156,180 @@
       <p:grpSpPr/>
       <p:sp>
         <p:nvSpPr>
-          <p:cNvPr id="2" name="Rounded Rectangle 1"/>
+          <p:cNvPr id="2" name="Rectangle 1"/>
           <p:cNvSpPr/>
           <p:nvPr/>
         </p:nvSpPr>
         <p:spPr>
           <a:xfrm>
-            <a:off x="640080" y="640080"/>
-            <a:ext cx="10908792" cy="5577840"/>
+            <a:off x="0" y="0"/>
+            <a:ext cx="12191695" cy="146304"/>
+          </a:xfrm>
+          <a:prstGeom prst="rect">
+            <a:avLst/>
+          </a:prstGeom>
+          <a:solidFill>
+            <a:srgbClr val="E3B23C"/>
+          </a:solidFill>
+          <a:ln>
+            <a:noFill/>
+          </a:ln>
+          <a:effectLst/>
+        </p:spPr>
+        <p:style>
+          <a:lnRef idx="1">
+            <a:schemeClr val="accent1"/>
+          </a:lnRef>
+          <a:fillRef idx="3">
+            <a:schemeClr val="accent1"/>
+          </a:fillRef>
+          <a:effectRef idx="2">
+            <a:schemeClr val="accent1"/>
+          </a:effectRef>
+          <a:fontRef idx="minor">
+            <a:schemeClr val="lt1"/>
+          </a:fontRef>
+        </p:style>
+        <p:txBody>
+          <a:bodyPr rtlCol="0" anchor="ctr"/>
+          <a:lstStyle/>
+          <a:p>
+            <a:pPr algn="ctr"/>
+          </a:p>
+        </p:txBody>
+      </p:sp>
+      <p:sp>
+        <p:nvSpPr>
+          <p:cNvPr id="3" name="TextBox 2"/>
+          <p:cNvSpPr txBox="1"/>
+          <p:nvPr/>
+        </p:nvSpPr>
+        <p:spPr>
+          <a:xfrm>
+            <a:off x="822960" y="457200"/>
+            <a:ext cx="10515600" cy="457200"/>
+          </a:xfrm>
+          <a:prstGeom prst="rect">
+            <a:avLst/>
+          </a:prstGeom>
+          <a:noFill/>
+        </p:spPr>
+        <p:txBody>
+          <a:bodyPr wrap="square" anchor="t">
+            <a:spAutoFit/>
+          </a:bodyPr>
+          <a:lstStyle/>
+          <a:p>
+            <a:pPr algn="l">
+              <a:spcAft>
+                <a:spcPts val="600"/>
+              </a:spcAft>
+            </a:pPr>
+            <a:r>
+              <a:rPr sz="1800" b="1">
+                <a:solidFill>
+                  <a:srgbClr val="C84B31"/>
+                </a:solidFill>
+                <a:latin typeface="Calibri"/>
+              </a:rPr>
+              <a:t>CUÁNDO CADA UNA</a:t>
+            </a:r>
+          </a:p>
+        </p:txBody>
+      </p:sp>
+      <p:sp>
+        <p:nvSpPr>
+          <p:cNvPr id="4" name="TextBox 3"/>
+          <p:cNvSpPr txBox="1"/>
+          <p:nvPr/>
+        </p:nvSpPr>
+        <p:spPr>
+          <a:xfrm>
+            <a:off x="822960" y="914400"/>
+            <a:ext cx="10607040" cy="1005840"/>
+          </a:xfrm>
+          <a:prstGeom prst="rect">
+            <a:avLst/>
+          </a:prstGeom>
+          <a:noFill/>
+        </p:spPr>
+        <p:txBody>
+          <a:bodyPr wrap="square" anchor="t">
+            <a:spAutoFit/>
+          </a:bodyPr>
+          <a:lstStyle/>
+          <a:p>
+            <a:pPr algn="l">
+              <a:spcAft>
+                <a:spcPts val="600"/>
+              </a:spcAft>
+            </a:pPr>
+            <a:r>
+              <a:rPr sz="3800" b="1">
+                <a:solidFill>
+                  <a:srgbClr val="6D2E46"/>
+                </a:solidFill>
+                <a:latin typeface="Calibri"/>
+              </a:rPr>
+              <a:t>PWA vs app nativa</a:t>
+            </a:r>
+          </a:p>
+        </p:txBody>
+      </p:sp>
+      <p:sp>
+        <p:nvSpPr>
+          <p:cNvPr id="5" name="Rectangle 4"/>
+          <p:cNvSpPr/>
+          <p:nvPr/>
+        </p:nvSpPr>
+        <p:spPr>
+          <a:xfrm>
+            <a:off x="868680" y="1783080"/>
+            <a:ext cx="1554480" cy="64008"/>
+          </a:xfrm>
+          <a:prstGeom prst="rect">
+            <a:avLst/>
+          </a:prstGeom>
+          <a:solidFill>
+            <a:srgbClr val="E3B23C"/>
+          </a:solidFill>
+          <a:ln>
+            <a:noFill/>
+          </a:ln>
+          <a:effectLst/>
+        </p:spPr>
+        <p:style>
+          <a:lnRef idx="1">
+            <a:schemeClr val="accent1"/>
+          </a:lnRef>
+          <a:fillRef idx="3">
+            <a:schemeClr val="accent1"/>
+          </a:fillRef>
+          <a:effectRef idx="2">
+            <a:schemeClr val="accent1"/>
+          </a:effectRef>
+          <a:fontRef idx="minor">
+            <a:schemeClr val="lt1"/>
+          </a:fontRef>
+        </p:style>
+        <p:txBody>
+          <a:bodyPr rtlCol="0" anchor="ctr"/>
+          <a:lstStyle/>
+          <a:p>
+            <a:pPr algn="ctr"/>
+          </a:p>
+        </p:txBody>
+      </p:sp>
+      <p:sp>
+        <p:nvSpPr>
+          <p:cNvPr id="6" name="Rounded Rectangle 5"/>
+          <p:cNvSpPr/>
+          <p:nvPr/>
+        </p:nvSpPr>
+        <p:spPr>
+          <a:xfrm>
+            <a:off x="868680" y="2148840"/>
+            <a:ext cx="5074920" cy="4206240"/>
           </a:xfrm>
           <a:prstGeom prst="roundRect">
             <a:avLst/>
@@ -5746,20 +6368,20 @@
       </p:sp>
       <p:sp>
         <p:nvSpPr>
-          <p:cNvPr id="3" name="Rectangle 2"/>
+          <p:cNvPr id="7" name="Rounded Rectangle 6"/>
           <p:cNvSpPr/>
           <p:nvPr/>
         </p:nvSpPr>
         <p:spPr>
           <a:xfrm>
-            <a:off x="640080" y="640080"/>
-            <a:ext cx="201168" cy="5577840"/>
-          </a:xfrm>
-          <a:prstGeom prst="rect">
+            <a:off x="868680" y="2148840"/>
+            <a:ext cx="5074920" cy="777240"/>
+          </a:xfrm>
+          <a:prstGeom prst="roundRect">
             <a:avLst/>
           </a:prstGeom>
           <a:solidFill>
-            <a:srgbClr val="E3B23C"/>
+            <a:srgbClr val="3A6B7E"/>
           </a:solidFill>
           <a:ln>
             <a:noFill/>
@@ -5790,14 +6412,58 @@
       </p:sp>
       <p:sp>
         <p:nvSpPr>
-          <p:cNvPr id="4" name="TextBox 3"/>
+          <p:cNvPr id="8" name="Rectangle 7"/>
+          <p:cNvSpPr/>
+          <p:nvPr/>
+        </p:nvSpPr>
+        <p:spPr>
+          <a:xfrm>
+            <a:off x="868680" y="2606040"/>
+            <a:ext cx="5074920" cy="320040"/>
+          </a:xfrm>
+          <a:prstGeom prst="rect">
+            <a:avLst/>
+          </a:prstGeom>
+          <a:solidFill>
+            <a:srgbClr val="3A6B7E"/>
+          </a:solidFill>
+          <a:ln>
+            <a:noFill/>
+          </a:ln>
+          <a:effectLst/>
+        </p:spPr>
+        <p:style>
+          <a:lnRef idx="1">
+            <a:schemeClr val="accent1"/>
+          </a:lnRef>
+          <a:fillRef idx="3">
+            <a:schemeClr val="accent1"/>
+          </a:fillRef>
+          <a:effectRef idx="2">
+            <a:schemeClr val="accent1"/>
+          </a:effectRef>
+          <a:fontRef idx="minor">
+            <a:schemeClr val="lt1"/>
+          </a:fontRef>
+        </p:style>
+        <p:txBody>
+          <a:bodyPr rtlCol="0" anchor="ctr"/>
+          <a:lstStyle/>
+          <a:p>
+            <a:pPr algn="ctr"/>
+          </a:p>
+        </p:txBody>
+      </p:sp>
+      <p:sp>
+        <p:nvSpPr>
+          <p:cNvPr id="9" name="TextBox 8"/>
           <p:cNvSpPr txBox="1"/>
           <p:nvPr/>
         </p:nvSpPr>
         <p:spPr>
           <a:xfrm>
-            <a:off x="1051560" y="960120"/>
-            <a:ext cx="10058400" cy="457200"/>
+            <a:off x="1188720" y="2258568"/>
+            <a:ext cx="4526280" cy="640080"/>
           </a:xfrm>
           <a:prstGeom prst="rect">
             <a:avLst/>
@@ -5805,7 +6471,7 @@
           <a:noFill/>
         </p:spPr>
         <p:txBody>
-          <a:bodyPr wrap="square" anchor="t">
+          <a:bodyPr wrap="square" anchor="ctr">
             <a:spAutoFit/>
           </a:bodyPr>
           <a:lstStyle/>
@@ -5816,66 +6482,27 @@
               </a:spcAft>
             </a:pPr>
             <a:r>
-              <a:rPr sz="2000" b="1">
-                <a:solidFill>
-                  <a:srgbClr val="C84B31"/>
-                </a:solidFill>
-                <a:latin typeface="Calibri"/>
-              </a:rPr>
-              <a:t>LABORATORIO DE HOY</a:t>
-            </a:r>
-          </a:p>
-        </p:txBody>
-      </p:sp>
-      <p:sp>
-        <p:nvSpPr>
-          <p:cNvPr id="5" name="TextBox 4"/>
+              <a:rPr sz="2400" b="1">
+                <a:solidFill>
+                  <a:srgbClr val="FFFFFF"/>
+                </a:solidFill>
+                <a:latin typeface="Calibri"/>
+              </a:rPr>
+              <a:t>PWA</a:t>
+            </a:r>
+          </a:p>
+        </p:txBody>
+      </p:sp>
+      <p:sp>
+        <p:nvSpPr>
+          <p:cNvPr id="10" name="TextBox 9"/>
           <p:cNvSpPr txBox="1"/>
           <p:nvPr/>
         </p:nvSpPr>
         <p:spPr>
           <a:xfrm>
-            <a:off x="1051560" y="1463040"/>
-            <a:ext cx="10058400" cy="914400"/>
-          </a:xfrm>
-          <a:prstGeom prst="rect">
-            <a:avLst/>
-          </a:prstGeom>
-          <a:noFill/>
-        </p:spPr>
-        <p:txBody>
-          <a:bodyPr wrap="square" anchor="t">
-            <a:spAutoFit/>
-          </a:bodyPr>
-          <a:lstStyle/>
-          <a:p>
-            <a:pPr algn="l">
-              <a:spcAft>
-                <a:spcPts val="600"/>
-              </a:spcAft>
-            </a:pPr>
-            <a:r>
-              <a:rPr sz="3400" b="1">
-                <a:solidFill>
-                  <a:srgbClr val="6D2E46"/>
-                </a:solidFill>
-                <a:latin typeface="Calibri"/>
-              </a:rPr>
-              <a:t>Laboratorio 4 — App nativa en el emulador del navegador</a:t>
-            </a:r>
-          </a:p>
-        </p:txBody>
-      </p:sp>
-      <p:sp>
-        <p:nvSpPr>
-          <p:cNvPr id="6" name="TextBox 5"/>
-          <p:cNvSpPr txBox="1"/>
-          <p:nvPr/>
-        </p:nvSpPr>
-        <p:spPr>
-          <a:xfrm>
-            <a:off x="1097280" y="2606040"/>
-            <a:ext cx="9875520" cy="3383280"/>
+            <a:off x="1188720" y="3154680"/>
+            <a:ext cx="4434840" cy="3017520"/>
           </a:xfrm>
           <a:prstGeom prst="rect">
             <a:avLst/>
@@ -5890,81 +6517,357 @@
           <a:p>
             <a:pPr>
               <a:spcAft>
-                <a:spcPts val="1500"/>
-              </a:spcAft>
-            </a:pPr>
-            <a:r>
-              <a:rPr sz="2300">
+                <a:spcPts val="1200"/>
+              </a:spcAft>
+            </a:pPr>
+            <a:r>
+              <a:rPr sz="1900">
                 <a:solidFill>
                   <a:srgbClr val="2B2B2B"/>
                 </a:solidFill>
                 <a:latin typeface="Calibri"/>
               </a:rPr>
-              <a:t>•  Crea una app nueva en AI Studio (modo Build)</a:t>
+              <a:t>•  Vive en el navegador</a:t>
             </a:r>
           </a:p>
           <a:p>
             <a:pPr>
               <a:spcAft>
-                <a:spcPts val="1500"/>
-              </a:spcAft>
-            </a:pPr>
-            <a:r>
-              <a:rPr sz="2300">
+                <a:spcPts val="1200"/>
+              </a:spcAft>
+            </a:pPr>
+            <a:r>
+              <a:rPr sz="1900">
                 <a:solidFill>
                   <a:srgbClr val="2B2B2B"/>
                 </a:solidFill>
                 <a:latin typeface="Calibri"/>
               </a:rPr>
-              <a:t>•  Pide una app nativa de Android (Kotlin + Jetpack Compose) "Bitácora Visual"</a:t>
+              <a:t>•  Se instala desde una URL</a:t>
             </a:r>
           </a:p>
           <a:p>
             <a:pPr>
               <a:spcAft>
-                <a:spcPts val="1500"/>
-              </a:spcAft>
-            </a:pPr>
-            <a:r>
-              <a:rPr sz="2300">
+                <a:spcPts val="1200"/>
+              </a:spcAft>
+            </a:pPr>
+            <a:r>
+              <a:rPr sz="1900">
                 <a:solidFill>
                   <a:srgbClr val="2B2B2B"/>
                 </a:solidFill>
                 <a:latin typeface="Calibri"/>
               </a:rPr>
-              <a:t>•  Revisa la bitácora de ejemplo en el emulador integrado del navegador</a:t>
+              <a:t>•  Alcance y velocidad de publicación</a:t>
             </a:r>
           </a:p>
           <a:p>
             <a:pPr>
               <a:spcAft>
-                <a:spcPts val="1500"/>
-              </a:spcAft>
-            </a:pPr>
-            <a:r>
-              <a:rPr sz="2300">
+                <a:spcPts val="1200"/>
+              </a:spcAft>
+            </a:pPr>
+            <a:r>
+              <a:rPr sz="1900">
                 <a:solidFill>
                   <a:srgbClr val="2B2B2B"/>
                 </a:solidFill>
                 <a:latin typeface="Calibri"/>
               </a:rPr>
-              <a:t>•  Prueba "Install on Device" en tu teléfono por USB (opcional)</a:t>
+              <a:t>•  Ideal para catálogos y contenido</a:t>
             </a:r>
           </a:p>
           <a:p>
             <a:pPr>
               <a:spcAft>
-                <a:spcPts val="1500"/>
-              </a:spcAft>
-            </a:pPr>
-            <a:r>
-              <a:rPr sz="2300">
+                <a:spcPts val="1200"/>
+              </a:spcAft>
+            </a:pPr>
+            <a:r>
+              <a:rPr sz="1900">
                 <a:solidFill>
                   <a:srgbClr val="2B2B2B"/>
                 </a:solidFill>
                 <a:latin typeface="Calibri"/>
               </a:rPr>
-              <a:t>•  Refina la cuadrícula de entradas y revisa con View diff</a:t>
+              <a:t>•  Una base de código para todos</a:t>
+            </a:r>
+          </a:p>
+        </p:txBody>
+      </p:sp>
+      <p:sp>
+        <p:nvSpPr>
+          <p:cNvPr id="11" name="Rounded Rectangle 10"/>
+          <p:cNvSpPr/>
+          <p:nvPr/>
+        </p:nvSpPr>
+        <p:spPr>
+          <a:xfrm>
+            <a:off x="6263640" y="2148840"/>
+            <a:ext cx="5074920" cy="4206240"/>
+          </a:xfrm>
+          <a:prstGeom prst="roundRect">
+            <a:avLst/>
+          </a:prstGeom>
+          <a:solidFill>
+            <a:srgbClr val="FFFFFF"/>
+          </a:solidFill>
+          <a:ln w="15240">
+            <a:solidFill>
+              <a:srgbClr val="EADDC8"/>
+            </a:solidFill>
+          </a:ln>
+          <a:effectLst/>
+        </p:spPr>
+        <p:style>
+          <a:lnRef idx="1">
+            <a:schemeClr val="accent1"/>
+          </a:lnRef>
+          <a:fillRef idx="3">
+            <a:schemeClr val="accent1"/>
+          </a:fillRef>
+          <a:effectRef idx="2">
+            <a:schemeClr val="accent1"/>
+          </a:effectRef>
+          <a:fontRef idx="minor">
+            <a:schemeClr val="lt1"/>
+          </a:fontRef>
+        </p:style>
+        <p:txBody>
+          <a:bodyPr rtlCol="0" anchor="ctr"/>
+          <a:lstStyle/>
+          <a:p>
+            <a:pPr algn="ctr"/>
+          </a:p>
+        </p:txBody>
+      </p:sp>
+      <p:sp>
+        <p:nvSpPr>
+          <p:cNvPr id="12" name="Rounded Rectangle 11"/>
+          <p:cNvSpPr/>
+          <p:nvPr/>
+        </p:nvSpPr>
+        <p:spPr>
+          <a:xfrm>
+            <a:off x="6263640" y="2148840"/>
+            <a:ext cx="5074920" cy="777240"/>
+          </a:xfrm>
+          <a:prstGeom prst="roundRect">
+            <a:avLst/>
+          </a:prstGeom>
+          <a:solidFill>
+            <a:srgbClr val="6D2E46"/>
+          </a:solidFill>
+          <a:ln>
+            <a:noFill/>
+          </a:ln>
+          <a:effectLst/>
+        </p:spPr>
+        <p:style>
+          <a:lnRef idx="1">
+            <a:schemeClr val="accent1"/>
+          </a:lnRef>
+          <a:fillRef idx="3">
+            <a:schemeClr val="accent1"/>
+          </a:fillRef>
+          <a:effectRef idx="2">
+            <a:schemeClr val="accent1"/>
+          </a:effectRef>
+          <a:fontRef idx="minor">
+            <a:schemeClr val="lt1"/>
+          </a:fontRef>
+        </p:style>
+        <p:txBody>
+          <a:bodyPr rtlCol="0" anchor="ctr"/>
+          <a:lstStyle/>
+          <a:p>
+            <a:pPr algn="ctr"/>
+          </a:p>
+        </p:txBody>
+      </p:sp>
+      <p:sp>
+        <p:nvSpPr>
+          <p:cNvPr id="13" name="Rectangle 12"/>
+          <p:cNvSpPr/>
+          <p:nvPr/>
+        </p:nvSpPr>
+        <p:spPr>
+          <a:xfrm>
+            <a:off x="6263640" y="2606040"/>
+            <a:ext cx="5074920" cy="320040"/>
+          </a:xfrm>
+          <a:prstGeom prst="rect">
+            <a:avLst/>
+          </a:prstGeom>
+          <a:solidFill>
+            <a:srgbClr val="6D2E46"/>
+          </a:solidFill>
+          <a:ln>
+            <a:noFill/>
+          </a:ln>
+          <a:effectLst/>
+        </p:spPr>
+        <p:style>
+          <a:lnRef idx="1">
+            <a:schemeClr val="accent1"/>
+          </a:lnRef>
+          <a:fillRef idx="3">
+            <a:schemeClr val="accent1"/>
+          </a:fillRef>
+          <a:effectRef idx="2">
+            <a:schemeClr val="accent1"/>
+          </a:effectRef>
+          <a:fontRef idx="minor">
+            <a:schemeClr val="lt1"/>
+          </a:fontRef>
+        </p:style>
+        <p:txBody>
+          <a:bodyPr rtlCol="0" anchor="ctr"/>
+          <a:lstStyle/>
+          <a:p>
+            <a:pPr algn="ctr"/>
+          </a:p>
+        </p:txBody>
+      </p:sp>
+      <p:sp>
+        <p:nvSpPr>
+          <p:cNvPr id="14" name="TextBox 13"/>
+          <p:cNvSpPr txBox="1"/>
+          <p:nvPr/>
+        </p:nvSpPr>
+        <p:spPr>
+          <a:xfrm>
+            <a:off x="6583680" y="2258568"/>
+            <a:ext cx="4526280" cy="640080"/>
+          </a:xfrm>
+          <a:prstGeom prst="rect">
+            <a:avLst/>
+          </a:prstGeom>
+          <a:noFill/>
+        </p:spPr>
+        <p:txBody>
+          <a:bodyPr wrap="square" anchor="ctr">
+            <a:spAutoFit/>
+          </a:bodyPr>
+          <a:lstStyle/>
+          <a:p>
+            <a:pPr algn="l">
+              <a:spcAft>
+                <a:spcPts val="600"/>
+              </a:spcAft>
+            </a:pPr>
+            <a:r>
+              <a:rPr sz="2400" b="1">
+                <a:solidFill>
+                  <a:srgbClr val="FFFFFF"/>
+                </a:solidFill>
+                <a:latin typeface="Calibri"/>
+              </a:rPr>
+              <a:t>Nativa (Android)</a:t>
+            </a:r>
+          </a:p>
+        </p:txBody>
+      </p:sp>
+      <p:sp>
+        <p:nvSpPr>
+          <p:cNvPr id="15" name="TextBox 14"/>
+          <p:cNvSpPr txBox="1"/>
+          <p:nvPr/>
+        </p:nvSpPr>
+        <p:spPr>
+          <a:xfrm>
+            <a:off x="6583680" y="3154680"/>
+            <a:ext cx="4434840" cy="3017520"/>
+          </a:xfrm>
+          <a:prstGeom prst="rect">
+            <a:avLst/>
+          </a:prstGeom>
+          <a:noFill/>
+        </p:spPr>
+        <p:txBody>
+          <a:bodyPr wrap="square">
+            <a:spAutoFit/>
+          </a:bodyPr>
+          <a:lstStyle/>
+          <a:p>
+            <a:pPr>
+              <a:spcAft>
+                <a:spcPts val="1200"/>
+              </a:spcAft>
+            </a:pPr>
+            <a:r>
+              <a:rPr sz="1900">
+                <a:solidFill>
+                  <a:srgbClr val="2B2B2B"/>
+                </a:solidFill>
+                <a:latin typeface="Calibri"/>
+              </a:rPr>
+              <a:t>•  Se instala desde la tienda (Play Store)</a:t>
+            </a:r>
+          </a:p>
+          <a:p>
+            <a:pPr>
+              <a:spcAft>
+                <a:spcPts val="1200"/>
+              </a:spcAft>
+            </a:pPr>
+            <a:r>
+              <a:rPr sz="1900">
+                <a:solidFill>
+                  <a:srgbClr val="2B2B2B"/>
+                </a:solidFill>
+                <a:latin typeface="Calibri"/>
+              </a:rPr>
+              <a:t>•  Mejor acceso al teléfono: cámara, sensores</a:t>
+            </a:r>
+          </a:p>
+          <a:p>
+            <a:pPr>
+              <a:spcAft>
+                <a:spcPts val="1200"/>
+              </a:spcAft>
+            </a:pPr>
+            <a:r>
+              <a:rPr sz="1900">
+                <a:solidFill>
+                  <a:srgbClr val="2B2B2B"/>
+                </a:solidFill>
+                <a:latin typeface="Calibri"/>
+              </a:rPr>
+              <a:t>•  Presencia y descubrimiento en la tienda</a:t>
+            </a:r>
+          </a:p>
+          <a:p>
+            <a:pPr>
+              <a:spcAft>
+                <a:spcPts val="1200"/>
+              </a:spcAft>
+            </a:pPr>
+            <a:r>
+              <a:rPr sz="1900">
+                <a:solidFill>
+                  <a:srgbClr val="2B2B2B"/>
+                </a:solidFill>
+                <a:latin typeface="Calibri"/>
+              </a:rPr>
+              <a:t>•  Ideal para herramientas que capturan</a:t>
+            </a:r>
+          </a:p>
+          <a:p>
+            <a:pPr>
+              <a:spcAft>
+                <a:spcPts val="1200"/>
+              </a:spcAft>
+            </a:pPr>
+            <a:r>
+              <a:rPr sz="1900">
+                <a:solidFill>
+                  <a:srgbClr val="2B2B2B"/>
+                </a:solidFill>
+                <a:latin typeface="Calibri"/>
+              </a:rPr>
+              <a:t>•  Rendimiento y experiencia más ricos</a:t>
             </a:r>
           </a:p>
         </p:txBody>
@@ -6010,7 +6913,7 @@
             <a:avLst/>
           </a:prstGeom>
           <a:solidFill>
-            <a:srgbClr val="6D2E46"/>
+            <a:srgbClr val="C84B31"/>
           </a:solidFill>
           <a:ln>
             <a:noFill/>
@@ -6073,7 +6976,7 @@
                 </a:solidFill>
                 <a:latin typeface="Calibri"/>
               </a:rPr>
-              <a:t>CIERRE</a:t>
+              <a:t>A DÓNDE LLEGAMOS</a:t>
             </a:r>
           </a:p>
         </p:txBody>
@@ -6087,7 +6990,7 @@
         <p:spPr>
           <a:xfrm>
             <a:off x="822960" y="914400"/>
-            <a:ext cx="10515600" cy="822960"/>
+            <a:ext cx="10607040" cy="1005840"/>
           </a:xfrm>
           <a:prstGeom prst="rect">
             <a:avLst/>
@@ -6106,13 +7009,13 @@
               </a:spcAft>
             </a:pPr>
             <a:r>
-              <a:rPr sz="3600" b="1">
+              <a:rPr sz="3800" b="1">
                 <a:solidFill>
                   <a:srgbClr val="6D2E46"/>
                 </a:solidFill>
                 <a:latin typeface="Calibri"/>
               </a:rPr>
-              <a:t>Lo que nos llevamos y la tarea</a:t>
+              <a:t>Bitácora Visual en el emulador del navegador</a:t>
             </a:r>
           </a:p>
         </p:txBody>
@@ -6169,17 +7072,19 @@
         </p:nvSpPr>
         <p:spPr>
           <a:xfrm>
-            <a:off x="822960" y="2148840"/>
-            <a:ext cx="5257800" cy="4160520"/>
+            <a:off x="9134856" y="1819655"/>
+            <a:ext cx="2053369" cy="4315968"/>
           </a:xfrm>
           <a:prstGeom prst="roundRect">
             <a:avLst/>
           </a:prstGeom>
           <a:solidFill>
-            <a:srgbClr val="F6ECDD"/>
+            <a:srgbClr val="FFFFFF"/>
           </a:solidFill>
-          <a:ln>
-            <a:noFill/>
+          <a:ln w="15240">
+            <a:solidFill>
+              <a:srgbClr val="6D2E46"/>
+            </a:solidFill>
           </a:ln>
           <a:effectLst/>
         </p:spPr>
@@ -6205,16 +7110,40 @@
           </a:p>
         </p:txBody>
       </p:sp>
-      <p:sp>
-        <p:nvSpPr>
-          <p:cNvPr id="7" name="TextBox 6"/>
+      <p:pic>
+        <p:nvPicPr>
+          <p:cNvPr id="7" name="Picture 6" descr="bitacora-grid.png"/>
+          <p:cNvPicPr>
+            <a:picLocks noChangeAspect="1"/>
+          </p:cNvPicPr>
+          <p:nvPr/>
+        </p:nvPicPr>
+        <p:blipFill>
+          <a:blip r:embed="rId2"/>
+          <a:stretch>
+            <a:fillRect/>
+          </a:stretch>
+        </p:blipFill>
+        <p:spPr>
+          <a:xfrm>
+            <a:off x="9189720" y="1874519"/>
+            <a:ext cx="1943642" cy="4206240"/>
+          </a:xfrm>
+          <a:prstGeom prst="rect">
+            <a:avLst/>
+          </a:prstGeom>
+        </p:spPr>
+      </p:pic>
+      <p:sp>
+        <p:nvSpPr>
+          <p:cNvPr id="8" name="TextBox 7"/>
           <p:cNvSpPr txBox="1"/>
           <p:nvPr/>
         </p:nvSpPr>
         <p:spPr>
           <a:xfrm>
-            <a:off x="1097280" y="2377440"/>
-            <a:ext cx="4754880" cy="457200"/>
+            <a:off x="8366760" y="6208775"/>
+            <a:ext cx="3589561" cy="457200"/>
           </a:xfrm>
           <a:prstGeom prst="rect">
             <a:avLst/>
@@ -6227,33 +7156,33 @@
           </a:bodyPr>
           <a:lstStyle/>
           <a:p>
-            <a:pPr algn="l">
+            <a:pPr algn="ctr">
               <a:spcAft>
                 <a:spcPts val="600"/>
               </a:spcAft>
             </a:pPr>
             <a:r>
-              <a:rPr sz="2200" b="1">
-                <a:solidFill>
-                  <a:srgbClr val="4F772D"/>
-                </a:solidFill>
-                <a:latin typeface="Calibri"/>
-              </a:rPr>
-              <a:t>En resumen</a:t>
-            </a:r>
-          </a:p>
-        </p:txBody>
-      </p:sp>
-      <p:sp>
-        <p:nvSpPr>
-          <p:cNvPr id="8" name="TextBox 7"/>
+              <a:rPr sz="1300" b="1">
+                <a:solidFill>
+                  <a:srgbClr val="6D2E46"/>
+                </a:solidFill>
+                <a:latin typeface="Calibri"/>
+              </a:rPr>
+              <a:t>Nativa, en el emulador del navegador</a:t>
+            </a:r>
+          </a:p>
+        </p:txBody>
+      </p:sp>
+      <p:sp>
+        <p:nvSpPr>
+          <p:cNvPr id="9" name="TextBox 8"/>
           <p:cNvSpPr txBox="1"/>
           <p:nvPr/>
         </p:nvSpPr>
         <p:spPr>
           <a:xfrm>
-            <a:off x="1097280" y="2926080"/>
-            <a:ext cx="4754880" cy="3291840"/>
+            <a:off x="896112" y="2286000"/>
+            <a:ext cx="7680960" cy="4023360"/>
           </a:xfrm>
           <a:prstGeom prst="rect">
             <a:avLst/>
@@ -6268,203 +7197,65 @@
           <a:p>
             <a:pPr>
               <a:spcAft>
-                <a:spcPts val="1300"/>
-              </a:spcAft>
-            </a:pPr>
-            <a:r>
-              <a:rPr sz="2000">
+                <a:spcPts val="1500"/>
+              </a:spcAft>
+            </a:pPr>
+            <a:r>
+              <a:rPr sz="2200">
                 <a:solidFill>
                   <a:srgbClr val="2B2B2B"/>
                 </a:solidFill>
                 <a:latin typeface="Calibri"/>
               </a:rPr>
-              <a:t>•  Nativo conviene para cámara, tienda y rendimiento</a:t>
+              <a:t>•  Es una app nativa (Kotlin + Compose), pero tú la diriges con prompts</a:t>
             </a:r>
           </a:p>
           <a:p>
             <a:pPr>
               <a:spcAft>
-                <a:spcPts val="1300"/>
-              </a:spcAft>
-            </a:pPr>
-            <a:r>
-              <a:rPr sz="2000">
+                <a:spcPts val="1500"/>
+              </a:spcAft>
+            </a:pPr>
+            <a:r>
+              <a:rPr sz="2200">
                 <a:solidFill>
                   <a:srgbClr val="2B2B2B"/>
                 </a:solidFill>
                 <a:latin typeface="Calibri"/>
               </a:rPr>
-              <a:t>•  La app nativa se construye en AI Studio, sin terminal ni SDK</a:t>
+              <a:t>•  El emulador del navegador la muestra al instante</a:t>
             </a:r>
           </a:p>
           <a:p>
             <a:pPr>
               <a:spcAft>
-                <a:spcPts val="1300"/>
-              </a:spcAft>
-            </a:pPr>
-            <a:r>
-              <a:rPr sz="2000">
+                <a:spcPts val="1500"/>
+              </a:spcAft>
+            </a:pPr>
+            <a:r>
+              <a:rPr sz="2200">
                 <a:solidFill>
                   <a:srgbClr val="2B2B2B"/>
                 </a:solidFill>
                 <a:latin typeface="Calibri"/>
               </a:rPr>
-              <a:t>•  La IA construye nativo (Kotlin + Compose) igual que la PWA</a:t>
-            </a:r>
-          </a:p>
-        </p:txBody>
-      </p:sp>
-      <p:sp>
-        <p:nvSpPr>
-          <p:cNvPr id="9" name="Rounded Rectangle 8"/>
-          <p:cNvSpPr/>
-          <p:nvPr/>
-        </p:nvSpPr>
-        <p:spPr>
-          <a:xfrm>
-            <a:off x="6263640" y="2148840"/>
-            <a:ext cx="5120640" cy="4160520"/>
-          </a:xfrm>
-          <a:prstGeom prst="roundRect">
-            <a:avLst/>
-          </a:prstGeom>
-          <a:solidFill>
-            <a:srgbClr val="F6ECDD"/>
-          </a:solidFill>
-          <a:ln>
-            <a:noFill/>
-          </a:ln>
-          <a:effectLst/>
-        </p:spPr>
-        <p:style>
-          <a:lnRef idx="1">
-            <a:schemeClr val="accent1"/>
-          </a:lnRef>
-          <a:fillRef idx="3">
-            <a:schemeClr val="accent1"/>
-          </a:fillRef>
-          <a:effectRef idx="2">
-            <a:schemeClr val="accent1"/>
-          </a:effectRef>
-          <a:fontRef idx="minor">
-            <a:schemeClr val="lt1"/>
-          </a:fontRef>
-        </p:style>
-        <p:txBody>
-          <a:bodyPr rtlCol="0" anchor="ctr"/>
-          <a:lstStyle/>
-          <a:p>
-            <a:pPr algn="ctr"/>
-          </a:p>
-        </p:txBody>
-      </p:sp>
-      <p:sp>
-        <p:nvSpPr>
-          <p:cNvPr id="10" name="TextBox 9"/>
-          <p:cNvSpPr txBox="1"/>
-          <p:nvPr/>
-        </p:nvSpPr>
-        <p:spPr>
-          <a:xfrm>
-            <a:off x="6537960" y="2377440"/>
-            <a:ext cx="4572000" cy="457200"/>
-          </a:xfrm>
-          <a:prstGeom prst="rect">
-            <a:avLst/>
-          </a:prstGeom>
-          <a:noFill/>
-        </p:spPr>
-        <p:txBody>
-          <a:bodyPr wrap="square" anchor="t">
-            <a:spAutoFit/>
-          </a:bodyPr>
-          <a:lstStyle/>
-          <a:p>
-            <a:pPr algn="l">
-              <a:spcAft>
-                <a:spcPts val="600"/>
-              </a:spcAft>
-            </a:pPr>
-            <a:r>
-              <a:rPr sz="2200" b="1">
-                <a:solidFill>
-                  <a:srgbClr val="C84B31"/>
-                </a:solidFill>
-                <a:latin typeface="Calibri"/>
-              </a:rPr>
-              <a:t>Para la próxima</a:t>
-            </a:r>
-          </a:p>
-        </p:txBody>
-      </p:sp>
-      <p:sp>
-        <p:nvSpPr>
-          <p:cNvPr id="11" name="TextBox 10"/>
-          <p:cNvSpPr txBox="1"/>
-          <p:nvPr/>
-        </p:nvSpPr>
-        <p:spPr>
-          <a:xfrm>
-            <a:off x="6537960" y="2926080"/>
-            <a:ext cx="4572000" cy="3291840"/>
-          </a:xfrm>
-          <a:prstGeom prst="rect">
-            <a:avLst/>
-          </a:prstGeom>
-          <a:noFill/>
-        </p:spPr>
-        <p:txBody>
-          <a:bodyPr wrap="square">
-            <a:spAutoFit/>
-          </a:bodyPr>
-          <a:lstStyle/>
+              <a:t>•  Cuadrícula de entradas con la estética de tu marca</a:t>
+            </a:r>
+          </a:p>
           <a:p>
             <a:pPr>
               <a:spcAft>
-                <a:spcPts val="1300"/>
-              </a:spcAft>
-            </a:pPr>
-            <a:r>
-              <a:rPr sz="2000">
+                <a:spcPts val="1500"/>
+              </a:spcAft>
+            </a:pPr>
+            <a:r>
+              <a:rPr sz="2200">
                 <a:solidFill>
                   <a:srgbClr val="2B2B2B"/>
                 </a:solidFill>
                 <a:latin typeface="Calibri"/>
               </a:rPr>
-              <a:t>•  Tarea 4: investigación PWA vs nativo</a:t>
-            </a:r>
-          </a:p>
-          <a:p>
-            <a:pPr>
-              <a:spcAft>
-                <a:spcPts val="1300"/>
-              </a:spcAft>
-            </a:pPr>
-            <a:r>
-              <a:rPr sz="2000">
-                <a:solidFill>
-                  <a:srgbClr val="2B2B2B"/>
-                </a:solidFill>
-                <a:latin typeface="Calibri"/>
-              </a:rPr>
-              <a:t>•  Laboratorio 4: app nativa en el emulador del navegador con su cuadrícula</a:t>
-            </a:r>
-          </a:p>
-          <a:p>
-            <a:pPr>
-              <a:spcAft>
-                <a:spcPts val="1300"/>
-              </a:spcAft>
-            </a:pPr>
-            <a:r>
-              <a:rPr sz="2000">
-                <a:solidFill>
-                  <a:srgbClr val="2B2B2B"/>
-                </a:solidFill>
-                <a:latin typeface="Calibri"/>
-              </a:rPr>
-              <a:t>•  Examen Parcial en la próxima sesión: escrito en línea + entrega del Proyecto 1</a:t>
+              <a:t>•  Con "Install on Device" la instalas en tu teléfono por USB</a:t>
             </a:r>
           </a:p>
         </p:txBody>
